--- a/presos/Four_Channels_Diagram.pptx
+++ b/presos/Four_Channels_Diagram.pptx
@@ -5876,7 +5876,7 @@
         <p:spPr>
           <a:xfrm>
             <a:off x="3659428" y="5902465"/>
-            <a:ext cx="4879238" cy="387281"/>
+            <a:ext cx="4879238" cy="446863"/>
           </a:xfrm>
           <a:prstGeom prst="roundRect">
             <a:avLst>
@@ -5926,7 +5926,7 @@
                 </a:solidFill>
                 <a:latin typeface="Helvetica Neue"/>
               </a:rPr>
-              <a:t>Judge first, then write</a:t>
+              <a:t>Judge each passage on its own, then write</a:t>
             </a:r>
           </a:p>
           <a:p>
@@ -5945,7 +5945,26 @@
                 </a:solidFill>
                 <a:latin typeface="Helvetica Neue"/>
               </a:rPr>
-              <a:t>is this enough to answer? — if not, say so and stop</a:t>
+              <a:t>one passage per call — never judged as a set</a:t>
+            </a:r>
+          </a:p>
+          <a:p>
+            <a:pPr algn="ctr">
+              <a:spcBef>
+                <a:spcPts val="0"/>
+              </a:spcBef>
+              <a:spcAft>
+                <a:spcPts val="100"/>
+              </a:spcAft>
+            </a:pPr>
+            <a:r>
+              <a:rPr sz="850" b="0">
+                <a:solidFill>
+                  <a:srgbClr val="4A5158"/>
+                </a:solidFill>
+                <a:latin typeface="Helvetica Neue"/>
+              </a:rPr>
+              <a:t>if none of them helps, say so and stop</a:t>
             </a:r>
           </a:p>
         </p:txBody>
